--- a/cursos/recursos/desequilibrios-de-material/05-alfiles-de-distinto-color-convertir.pptx
+++ b/cursos/recursos/desequilibrios-de-material/05-alfiles-de-distinto-color-convertir.pptx
@@ -5383,7 +5383,7 @@
                 </a:solidFill>
                 <a:latin typeface="Calibri"/>
               </a:rPr>
-              <a:t>30.h4! impide la maniobra ...Bg5-d2-b4 y de paso gana espacio en el flanco de rey. Es un ejemplo de jugada profiláctica que vale más que ganar material de inmediato.</a:t>
+              <a:t>30.h4! impide la maniobra ...Ag5-d2-b4 y de paso gana espacio en el flanco de rey. Es un ejemplo de jugada profiláctica que vale más que ganar material de inmediato.</a:t>
             </a:r>
           </a:p>
         </p:txBody>

--- a/cursos/recursos/desequilibrios-de-material/05-alfiles-de-distinto-color-convertir.pptx
+++ b/cursos/recursos/desequilibrios-de-material/05-alfiles-de-distinto-color-convertir.pptx
@@ -4348,7 +4348,7 @@
                 </a:solidFill>
                 <a:latin typeface="Calibri"/>
               </a:rPr>
-              <a:t>•  En posiciones con alfiles de distinto color, evaluá primero la calidad y el alcance de cada alfil antes que el material: un alfil encerrado por peones propios vale muy poco.</a:t>
+              <a:t>•  En posiciones con alfiles de distinto color, evalúa primero la calidad y el alcance de cada alfil antes que el material: un alfil encerrado por peones propios vale muy poco.</a:t>
             </a:r>
           </a:p>
           <a:p>
@@ -6363,7 +6363,7 @@
                 </a:solidFill>
                 <a:latin typeface="Calibri"/>
               </a:rPr>
-              <a:t>•  Contra un alfil rival pasivo, jugá para impedir que encuentre una diagonal útil (aquí, con h2-h4) antes de lanzarte a ganar material.</a:t>
+              <a:t>•  Contra un alfil rival pasivo, juega para impedir que encuentre una diagonal útil (aquí, con h2-h4) antes de lanzarte a ganar material.</a:t>
             </a:r>
           </a:p>
           <a:p>
@@ -6981,7 +6981,7 @@
                 </a:solidFill>
                 <a:latin typeface="Calibri"/>
               </a:rPr>
-              <a:t>Pista: Pensá en ganar espacio en el flanco de dama con un avance de peón que amenace seguir avanzando.</a:t>
+              <a:t>Pista: Piensa en ganar espacio en el flanco de dama con un avance de peón que amenace seguir avanzando.</a:t>
             </a:r>
           </a:p>
         </p:txBody>
@@ -7304,7 +7304,7 @@
                 </a:solidFill>
                 <a:latin typeface="Calibri"/>
               </a:rPr>
-              <a:t>Pista: Pensá en cuál de las dos piezas negras (caballo o alfil) preferís que desaparezca del tablero, y qué captura fuerza justamente eso.</a:t>
+              <a:t>Pista: Piensa en cuál de las dos piezas negras (caballo o alfil) prefieres que desaparezca del tablero, y qué captura fuerza justamente eso.</a:t>
             </a:r>
           </a:p>
         </p:txBody>
@@ -8171,7 +8171,7 @@
                 </a:solidFill>
                 <a:latin typeface="Calibri"/>
               </a:rPr>
-              <a:t>•  En estructuras con peón en f5 (Najdorf tipo II), buscá cambiar las piezas negras que disputan d5 para quedarte con una pieza dominante en esa casilla.</a:t>
+              <a:t>•  En estructuras con peón en f5 (Najdorf tipo II), busca cambiar las piezas negras que disputan d5 para quedarte con una pieza dominante en esa casilla.</a:t>
             </a:r>
           </a:p>
           <a:p>
@@ -8203,7 +8203,7 @@
                 </a:solidFill>
                 <a:latin typeface="Calibri"/>
               </a:rPr>
-              <a:t>•  Con una pieza claramente dominante y sin contrajuego rival, avanzá los peones hacia el rey enemigo en vez de conformarte con la ventaja posicional adquirida.</a:t>
+              <a:t>•  Con una pieza claramente dominante y sin contrajuego rival, avanza los peones hacia el rey enemigo en vez de conformarte con la ventaja posicional adquirida.</a:t>
             </a:r>
           </a:p>
         </p:txBody>
@@ -8346,7 +8346,7 @@
                 </a:solidFill>
                 <a:latin typeface="Calibri"/>
               </a:rPr>
-              <a:t>Tomá la posición inicial de Adhiban–Vidit y jugala contra el motor con el bando de las negras (el peón de menos), buscando maximizar la actividad del alfil antes de que las blancas fijen un segundo frente. Después estudiá en Praggnanandhaa–Gopal cómo el control de una sola casilla central (d5) termina decidiendo una partida con alfiles de distinto color.</a:t>
+              <a:t>Toma la posición inicial de Adhiban–Vidit y juégala contra el motor con el bando de las negras (el peón de menos), buscando maximizar la actividad del alfil antes de que las blancas fijen un segundo frente. Después estudia en Praggnanandhaa–Gopal cómo el control de una sola casilla central (d5) termina decidiendo una partida con alfiles de distinto color.</a:t>
             </a:r>
           </a:p>
           <a:p>
@@ -8378,7 +8378,7 @@
                 </a:solidFill>
                 <a:latin typeface="Calibri"/>
               </a:rPr>
-              <a:t>En la página del curso podés recorrer cada partida con los comentarios, adivinar las jugadas clave en el tablero y continuar cualquier posición contra el motor (Stockfish). La hoja de ejercicios en PDF reúne los momentos clave de esta lección para resolver sin tablero.</a:t>
+              <a:t>En la página del curso puedes recorrer cada partida con los comentarios, adivinar las jugadas clave en el tablero y continuar cualquier posición contra el motor (Stockfish). La hoja de ejercicios en PDF reúne los momentos clave de esta lección para resolver sin tablero.</a:t>
             </a:r>
           </a:p>
         </p:txBody>
@@ -8417,7 +8417,7 @@
                 </a:solidFill>
                 <a:latin typeface="Calibri"/>
               </a:rPr>
-              <a:t>•  Primero recorré la partida completa leyendo los comentarios.</a:t>
+              <a:t>•  Primero recorre la partida completa leyendo los comentarios.</a:t>
             </a:r>
           </a:p>
           <a:p>
@@ -8433,7 +8433,7 @@
                 </a:solidFill>
                 <a:latin typeface="Calibri"/>
               </a:rPr>
-              <a:t>•  Después hacé el modo "adivinar las jugadas clave" hasta acertar todas.</a:t>
+              <a:t>•  Después haz el modo "adivinar las jugadas clave" hasta acertar todas.</a:t>
             </a:r>
           </a:p>
           <a:p>
@@ -8449,7 +8449,7 @@
                 </a:solidFill>
                 <a:latin typeface="Calibri"/>
               </a:rPr>
-              <a:t>•  Por último respondé el cuestionario y anotá con tus palabras las reglas de la lección.</a:t>
+              <a:t>•  Por último responde el cuestionario y anota con tus palabras las reglas de la lección.</a:t>
             </a:r>
           </a:p>
         </p:txBody>
@@ -9053,7 +9053,7 @@
                 </a:solidFill>
                 <a:latin typeface="Calibri"/>
               </a:rPr>
-              <a:t>•  Para convertir una ventaja mínima, buscá crear dos frentes de batalla distantes entre sí.</a:t>
+              <a:t>•  Para convertir una ventaja mínima, busca crear dos frentes de batalla distantes entre sí.</a:t>
             </a:r>
           </a:p>
           <a:p>
@@ -9069,7 +9069,7 @@
                 </a:solidFill>
                 <a:latin typeface="Calibri"/>
               </a:rPr>
-              <a:t>•  Clavá al alfil rival a la defensa de un peón fijo para anular su movilidad.</a:t>
+              <a:t>•  Clava al alfil rival a la defensa de un peón fijo para anular su movilidad.</a:t>
             </a:r>
           </a:p>
           <a:p>
@@ -9085,7 +9085,7 @@
                 </a:solidFill>
                 <a:latin typeface="Calibri"/>
               </a:rPr>
-              <a:t>•  Activá tu rey: en estos finales suele ser la pieza más fuerte, porque un solo alfil no controla todo el tablero.</a:t>
+              <a:t>•  Activa tu rey: en estos finales suele ser la pieza más fuerte, porque un solo alfil no controla todo el tablero.</a:t>
             </a:r>
           </a:p>
           <a:p>
@@ -9117,7 +9117,7 @@
                 </a:solidFill>
                 <a:latin typeface="Calibri"/>
               </a:rPr>
-              <a:t>•  Si defendés, buscá el final teórico del 'alfil de color equivocado' antes de resignarte a la pasividad.</a:t>
+              <a:t>•  Si defiendes, busca el final teórico del 'alfil de color equivocado' antes de resignarte a la pasividad.</a:t>
             </a:r>
           </a:p>
         </p:txBody>

--- a/cursos/recursos/desequilibrios-de-material/05-alfiles-de-distinto-color-convertir.pptx
+++ b/cursos/recursos/desequilibrios-de-material/05-alfiles-de-distinto-color-convertir.pptx
@@ -4348,7 +4348,7 @@
                 </a:solidFill>
                 <a:latin typeface="Calibri"/>
               </a:rPr>
-              <a:t>•  En posiciones con alfiles de distinto color, evaluá primero la calidad y el alcance de cada alfil antes que el material: un alfil encerrado por peones propios vale muy poco.</a:t>
+              <a:t>•  En posiciones con alfiles de distinto color, evalúa primero la calidad y el alcance de cada alfil antes que el material: un alfil encerrado por peones propios vale muy poco.</a:t>
             </a:r>
           </a:p>
           <a:p>
@@ -5383,7 +5383,7 @@
                 </a:solidFill>
                 <a:latin typeface="Calibri"/>
               </a:rPr>
-              <a:t>30.h4! impide la maniobra ...Bg5-d2-b4 y de paso gana espacio en el flanco de rey. Es un ejemplo de jugada profiláctica que vale más que ganar material de inmediato.</a:t>
+              <a:t>30.h4! impide la maniobra ...Ag5-d2-b4 y de paso gana espacio en el flanco de rey. Es un ejemplo de jugada profiláctica que vale más que ganar material de inmediato.</a:t>
             </a:r>
           </a:p>
         </p:txBody>
@@ -6363,7 +6363,7 @@
                 </a:solidFill>
                 <a:latin typeface="Calibri"/>
               </a:rPr>
-              <a:t>•  Contra un alfil rival pasivo, jugá para impedir que encuentre una diagonal útil (aquí, con h2-h4) antes de lanzarte a ganar material.</a:t>
+              <a:t>•  Contra un alfil rival pasivo, juega para impedir que encuentre una diagonal útil (aquí, con h2-h4) antes de lanzarte a ganar material.</a:t>
             </a:r>
           </a:p>
           <a:p>
@@ -6981,7 +6981,7 @@
                 </a:solidFill>
                 <a:latin typeface="Calibri"/>
               </a:rPr>
-              <a:t>Pista: Pensá en ganar espacio en el flanco de dama con un avance de peón que amenace seguir avanzando.</a:t>
+              <a:t>Pista: Piensa en ganar espacio en el flanco de dama con un avance de peón que amenace seguir avanzando.</a:t>
             </a:r>
           </a:p>
         </p:txBody>
@@ -7304,7 +7304,7 @@
                 </a:solidFill>
                 <a:latin typeface="Calibri"/>
               </a:rPr>
-              <a:t>Pista: Pensá en cuál de las dos piezas negras (caballo o alfil) preferís que desaparezca del tablero, y qué captura fuerza justamente eso.</a:t>
+              <a:t>Pista: Piensa en cuál de las dos piezas negras (caballo o alfil) prefieres que desaparezca del tablero, y qué captura fuerza justamente eso.</a:t>
             </a:r>
           </a:p>
         </p:txBody>
@@ -8171,7 +8171,7 @@
                 </a:solidFill>
                 <a:latin typeface="Calibri"/>
               </a:rPr>
-              <a:t>•  En estructuras con peón en f5 (Najdorf tipo II), buscá cambiar las piezas negras que disputan d5 para quedarte con una pieza dominante en esa casilla.</a:t>
+              <a:t>•  En estructuras con peón en f5 (Najdorf tipo II), busca cambiar las piezas negras que disputan d5 para quedarte con una pieza dominante en esa casilla.</a:t>
             </a:r>
           </a:p>
           <a:p>
@@ -8203,7 +8203,7 @@
                 </a:solidFill>
                 <a:latin typeface="Calibri"/>
               </a:rPr>
-              <a:t>•  Con una pieza claramente dominante y sin contrajuego rival, avanzá los peones hacia el rey enemigo en vez de conformarte con la ventaja posicional adquirida.</a:t>
+              <a:t>•  Con una pieza claramente dominante y sin contrajuego rival, avanza los peones hacia el rey enemigo en vez de conformarte con la ventaja posicional adquirida.</a:t>
             </a:r>
           </a:p>
         </p:txBody>
@@ -8346,7 +8346,7 @@
                 </a:solidFill>
                 <a:latin typeface="Calibri"/>
               </a:rPr>
-              <a:t>Tomá la posición inicial de Adhiban–Vidit y jugala contra el motor con el bando de las negras (el peón de menos), buscando maximizar la actividad del alfil antes de que las blancas fijen un segundo frente. Después estudiá en Praggnanandhaa–Gopal cómo el control de una sola casilla central (d5) termina decidiendo una partida con alfiles de distinto color.</a:t>
+              <a:t>Toma la posición inicial de Adhiban–Vidit y juégala contra el motor con el bando de las negras (el peón de menos), buscando maximizar la actividad del alfil antes de que las blancas fijen un segundo frente. Después estudia en Praggnanandhaa–Gopal cómo el control de una sola casilla central (d5) termina decidiendo una partida con alfiles de distinto color.</a:t>
             </a:r>
           </a:p>
           <a:p>
@@ -8378,7 +8378,7 @@
                 </a:solidFill>
                 <a:latin typeface="Calibri"/>
               </a:rPr>
-              <a:t>En la página del curso podés recorrer cada partida con los comentarios, adivinar las jugadas clave en el tablero y continuar cualquier posición contra el motor (Stockfish). La hoja de ejercicios en PDF reúne los momentos clave de esta lección para resolver sin tablero.</a:t>
+              <a:t>En la página del curso puedes recorrer cada partida con los comentarios, adivinar las jugadas clave en el tablero y continuar cualquier posición contra el motor (Stockfish). La hoja de ejercicios en PDF reúne los momentos clave de esta lección para resolver sin tablero.</a:t>
             </a:r>
           </a:p>
         </p:txBody>
@@ -8417,7 +8417,7 @@
                 </a:solidFill>
                 <a:latin typeface="Calibri"/>
               </a:rPr>
-              <a:t>•  Primero recorré la partida completa leyendo los comentarios.</a:t>
+              <a:t>•  Primero recorre la partida completa leyendo los comentarios.</a:t>
             </a:r>
           </a:p>
           <a:p>
@@ -8433,7 +8433,7 @@
                 </a:solidFill>
                 <a:latin typeface="Calibri"/>
               </a:rPr>
-              <a:t>•  Después hacé el modo "adivinar las jugadas clave" hasta acertar todas.</a:t>
+              <a:t>•  Después haz el modo "adivinar las jugadas clave" hasta acertar todas.</a:t>
             </a:r>
           </a:p>
           <a:p>
@@ -8449,7 +8449,7 @@
                 </a:solidFill>
                 <a:latin typeface="Calibri"/>
               </a:rPr>
-              <a:t>•  Por último respondé el cuestionario y anotá con tus palabras las reglas de la lección.</a:t>
+              <a:t>•  Por último responde el cuestionario y anota con tus palabras las reglas de la lección.</a:t>
             </a:r>
           </a:p>
         </p:txBody>
@@ -9053,7 +9053,7 @@
                 </a:solidFill>
                 <a:latin typeface="Calibri"/>
               </a:rPr>
-              <a:t>•  Para convertir una ventaja mínima, buscá crear dos frentes de batalla distantes entre sí.</a:t>
+              <a:t>•  Para convertir una ventaja mínima, busca crear dos frentes de batalla distantes entre sí.</a:t>
             </a:r>
           </a:p>
           <a:p>
@@ -9069,7 +9069,7 @@
                 </a:solidFill>
                 <a:latin typeface="Calibri"/>
               </a:rPr>
-              <a:t>•  Clavá al alfil rival a la defensa de un peón fijo para anular su movilidad.</a:t>
+              <a:t>•  Clava al alfil rival a la defensa de un peón fijo para anular su movilidad.</a:t>
             </a:r>
           </a:p>
           <a:p>
@@ -9085,7 +9085,7 @@
                 </a:solidFill>
                 <a:latin typeface="Calibri"/>
               </a:rPr>
-              <a:t>•  Activá tu rey: en estos finales suele ser la pieza más fuerte, porque un solo alfil no controla todo el tablero.</a:t>
+              <a:t>•  Activa tu rey: en estos finales suele ser la pieza más fuerte, porque un solo alfil no controla todo el tablero.</a:t>
             </a:r>
           </a:p>
           <a:p>
@@ -9117,7 +9117,7 @@
                 </a:solidFill>
                 <a:latin typeface="Calibri"/>
               </a:rPr>
-              <a:t>•  Si defendés, buscá el final teórico del 'alfil de color equivocado' antes de resignarte a la pasividad.</a:t>
+              <a:t>•  Si defiendes, busca el final teórico del 'alfil de color equivocado' antes de resignarte a la pasividad.</a:t>
             </a:r>
           </a:p>
         </p:txBody>
